--- a/finance/Fraud_Analytics/2_Data_that_fraud_leaves_behind.pptx
+++ b/finance/Fraud_Analytics/2_Data_that_fraud_leaves_behind.pptx
@@ -223,7 +223,7 @@
           <a:p>
             <a:fld id="{7BAEECA8-D063-486F-AE31-5020270C1449}" type="datetimeFigureOut">
               <a:rPr lang="en-US" smtClean="0"/>
-              <a:t>5/18/2026</a:t>
+              <a:t>10/17/2026</a:t>
             </a:fld>
             <a:endParaRPr lang="en-US"/>
           </a:p>
@@ -400,7 +400,7 @@
           <a:p>
             <a:fld id="{CB233BD1-3BA8-448D-9D08-7846095EA517}" type="datetimeFigureOut">
               <a:rPr lang="en-US" smtClean="0"/>
-              <a:t>5/18/2026</a:t>
+              <a:t>10/17/2026</a:t>
             </a:fld>
             <a:endParaRPr lang="en-US"/>
           </a:p>
@@ -814,7 +814,7 @@
           <a:p>
             <a:fld id="{6383FAE1-13DE-4511-8C1B-C8AFB720664C}" type="datetimeFigureOut">
               <a:rPr lang="en-US" smtClean="0"/>
-              <a:t>5/18/2026</a:t>
+              <a:t>10/17/2026</a:t>
             </a:fld>
             <a:endParaRPr lang="en-US"/>
           </a:p>
@@ -1012,7 +1012,7 @@
           <a:p>
             <a:fld id="{6383FAE1-13DE-4511-8C1B-C8AFB720664C}" type="datetimeFigureOut">
               <a:rPr lang="en-US" smtClean="0"/>
-              <a:t>5/18/2026</a:t>
+              <a:t>10/17/2026</a:t>
             </a:fld>
             <a:endParaRPr lang="en-US"/>
           </a:p>
@@ -1220,7 +1220,7 @@
           <a:p>
             <a:fld id="{6383FAE1-13DE-4511-8C1B-C8AFB720664C}" type="datetimeFigureOut">
               <a:rPr lang="en-US" smtClean="0"/>
-              <a:t>5/18/2026</a:t>
+              <a:t>10/17/2026</a:t>
             </a:fld>
             <a:endParaRPr lang="en-US"/>
           </a:p>
@@ -1418,7 +1418,7 @@
           <a:p>
             <a:fld id="{6383FAE1-13DE-4511-8C1B-C8AFB720664C}" type="datetimeFigureOut">
               <a:rPr lang="en-US" smtClean="0"/>
-              <a:t>5/18/2026</a:t>
+              <a:t>10/17/2026</a:t>
             </a:fld>
             <a:endParaRPr lang="en-US"/>
           </a:p>
@@ -1693,7 +1693,7 @@
           <a:p>
             <a:fld id="{6383FAE1-13DE-4511-8C1B-C8AFB720664C}" type="datetimeFigureOut">
               <a:rPr lang="en-US" smtClean="0"/>
-              <a:t>5/18/2026</a:t>
+              <a:t>10/17/2026</a:t>
             </a:fld>
             <a:endParaRPr lang="en-US"/>
           </a:p>
@@ -1958,7 +1958,7 @@
           <a:p>
             <a:fld id="{6383FAE1-13DE-4511-8C1B-C8AFB720664C}" type="datetimeFigureOut">
               <a:rPr lang="en-US" smtClean="0"/>
-              <a:t>5/18/2026</a:t>
+              <a:t>10/17/2026</a:t>
             </a:fld>
             <a:endParaRPr lang="en-US"/>
           </a:p>
@@ -2370,7 +2370,7 @@
           <a:p>
             <a:fld id="{6383FAE1-13DE-4511-8C1B-C8AFB720664C}" type="datetimeFigureOut">
               <a:rPr lang="en-US" smtClean="0"/>
-              <a:t>5/18/2026</a:t>
+              <a:t>10/17/2026</a:t>
             </a:fld>
             <a:endParaRPr lang="en-US"/>
           </a:p>
@@ -2511,7 +2511,7 @@
           <a:p>
             <a:fld id="{6383FAE1-13DE-4511-8C1B-C8AFB720664C}" type="datetimeFigureOut">
               <a:rPr lang="en-US" smtClean="0"/>
-              <a:t>5/18/2026</a:t>
+              <a:t>10/17/2026</a:t>
             </a:fld>
             <a:endParaRPr lang="en-US"/>
           </a:p>
@@ -2624,7 +2624,7 @@
           <a:p>
             <a:fld id="{6383FAE1-13DE-4511-8C1B-C8AFB720664C}" type="datetimeFigureOut">
               <a:rPr lang="en-US" smtClean="0"/>
-              <a:t>5/18/2026</a:t>
+              <a:t>10/17/2026</a:t>
             </a:fld>
             <a:endParaRPr lang="en-US"/>
           </a:p>
@@ -2935,7 +2935,7 @@
           <a:p>
             <a:fld id="{6383FAE1-13DE-4511-8C1B-C8AFB720664C}" type="datetimeFigureOut">
               <a:rPr lang="en-US" smtClean="0"/>
-              <a:t>5/18/2026</a:t>
+              <a:t>10/17/2026</a:t>
             </a:fld>
             <a:endParaRPr lang="en-US"/>
           </a:p>
@@ -3226,7 +3226,7 @@
           <a:p>
             <a:fld id="{6383FAE1-13DE-4511-8C1B-C8AFB720664C}" type="datetimeFigureOut">
               <a:rPr lang="en-US" smtClean="0"/>
-              <a:t>5/18/2026</a:t>
+              <a:t>10/17/2026</a:t>
             </a:fld>
             <a:endParaRPr lang="en-US"/>
           </a:p>
@@ -3470,7 +3470,7 @@
           <a:p>
             <a:fld id="{6383FAE1-13DE-4511-8C1B-C8AFB720664C}" type="datetimeFigureOut">
               <a:rPr lang="en-US" smtClean="0"/>
-              <a:t>5/18/2026</a:t>
+              <a:t>10/17/2026</a:t>
             </a:fld>
             <a:endParaRPr lang="en-US"/>
           </a:p>
@@ -4074,7 +4074,7 @@
         <p:spPr>
           <a:xfrm>
             <a:off x="676656" y="1334837"/>
-            <a:ext cx="10351008" cy="2962349"/>
+            <a:ext cx="10351008" cy="3218830"/>
           </a:xfrm>
           <a:prstGeom prst="rect">
             <a:avLst/>
@@ -4099,12 +4099,28 @@
             <a:r>
               <a:rPr lang="en-US" sz="2400" b="0" i="1" dirty="0">
                 <a:solidFill>
-                  <a:srgbClr val="C2C0B6"/>
+                  <a:schemeClr val="accent6">
+                    <a:lumMod val="60000"/>
+                    <a:lumOff val="40000"/>
+                  </a:schemeClr>
                 </a:solidFill>
                 <a:effectLst/>
                 <a:latin typeface="Anthropic Sans"/>
               </a:rPr>
-              <a:t>"Fraudsters are invisible people doing very visible things. The data always tells a story.“</a:t>
+              <a:t>"Fraudsters are invisible people doing very visible things</a:t>
+            </a:r>
+            <a:r>
+              <a:rPr lang="en-US" sz="2400" b="0" i="1">
+                <a:solidFill>
+                  <a:schemeClr val="accent6">
+                    <a:lumMod val="60000"/>
+                    <a:lumOff val="40000"/>
+                  </a:schemeClr>
+                </a:solidFill>
+                <a:effectLst/>
+                <a:latin typeface="Anthropic Sans"/>
+              </a:rPr>
+              <a:t>. </a:t>
             </a:r>
           </a:p>
           <a:p>
@@ -4117,12 +4133,32 @@
               </a:spcAft>
               <a:buNone/>
             </a:pPr>
-            <a:endParaRPr lang="en-US" sz="2400" i="1" dirty="0">
-              <a:solidFill>
-                <a:srgbClr val="C2C0B6"/>
-              </a:solidFill>
-              <a:latin typeface="Anthropic Sans"/>
-            </a:endParaRPr>
+            <a:r>
+              <a:rPr lang="en-US" sz="2400" b="0" i="1">
+                <a:solidFill>
+                  <a:schemeClr val="accent6">
+                    <a:lumMod val="60000"/>
+                    <a:lumOff val="40000"/>
+                  </a:schemeClr>
+                </a:solidFill>
+                <a:effectLst/>
+                <a:latin typeface="Anthropic Sans"/>
+              </a:rPr>
+              <a:t>The </a:t>
+            </a:r>
+            <a:r>
+              <a:rPr lang="en-US" sz="2400" b="0" i="1" dirty="0">
+                <a:solidFill>
+                  <a:schemeClr val="accent6">
+                    <a:lumMod val="60000"/>
+                    <a:lumOff val="40000"/>
+                  </a:schemeClr>
+                </a:solidFill>
+                <a:effectLst/>
+                <a:latin typeface="Anthropic Sans"/>
+              </a:rPr>
+              <a:t>data always tells a story.“</a:t>
+            </a:r>
           </a:p>
           <a:p>
             <a:pPr algn="l">
@@ -4134,10 +4170,33 @@
               </a:spcAft>
               <a:buNone/>
             </a:pPr>
+            <a:endParaRPr lang="en-US" sz="2400" i="1" dirty="0">
+              <a:solidFill>
+                <a:schemeClr val="accent6">
+                  <a:lumMod val="60000"/>
+                  <a:lumOff val="40000"/>
+                </a:schemeClr>
+              </a:solidFill>
+              <a:latin typeface="Anthropic Sans"/>
+            </a:endParaRPr>
+          </a:p>
+          <a:p>
+            <a:pPr algn="l">
+              <a:spcBef>
+                <a:spcPts val="900"/>
+              </a:spcBef>
+              <a:spcAft>
+                <a:spcPts val="1050"/>
+              </a:spcAft>
+              <a:buNone/>
+            </a:pPr>
             <a:r>
               <a:rPr lang="en-US" sz="2400" b="0" i="1" dirty="0">
                 <a:solidFill>
-                  <a:srgbClr val="C2C0B6"/>
+                  <a:schemeClr val="accent6">
+                    <a:lumMod val="60000"/>
+                    <a:lumOff val="40000"/>
+                  </a:schemeClr>
                 </a:solidFill>
                 <a:effectLst/>
                 <a:latin typeface="Anthropic Sans"/>
@@ -4153,20 +4212,16 @@
             <a:r>
               <a:rPr lang="en-US" sz="2400" b="0" i="0" dirty="0">
                 <a:solidFill>
-                  <a:srgbClr val="FAF9F5"/>
+                  <a:schemeClr val="accent6">
+                    <a:lumMod val="60000"/>
+                    <a:lumOff val="40000"/>
+                  </a:schemeClr>
                 </a:solidFill>
                 <a:effectLst/>
                 <a:latin typeface="Anthropic Sans"/>
               </a:rPr>
               <a:t>Feature engineering for fraud</a:t>
             </a:r>
-            <a:endParaRPr lang="en-US" sz="2400" b="0" i="0" dirty="0">
-              <a:solidFill>
-                <a:srgbClr val="FFFFFF"/>
-              </a:solidFill>
-              <a:effectLst/>
-              <a:latin typeface="Anthropic Sans"/>
-            </a:endParaRPr>
           </a:p>
           <a:p>
             <a:pPr marL="342900" indent="-342900" algn="l">
@@ -4176,7 +4231,10 @@
             <a:r>
               <a:rPr lang="en-US" sz="2400" b="0" i="0" dirty="0">
                 <a:solidFill>
-                  <a:srgbClr val="FAF9F5"/>
+                  <a:schemeClr val="accent6">
+                    <a:lumMod val="60000"/>
+                    <a:lumOff val="40000"/>
+                  </a:schemeClr>
                 </a:solidFill>
                 <a:effectLst/>
                 <a:latin typeface="Anthropic Sans"/>
@@ -4237,7 +4295,7 @@
         <p:spPr>
           <a:xfrm>
             <a:off x="283464" y="210125"/>
-            <a:ext cx="10351008" cy="2780248"/>
+            <a:ext cx="10351008" cy="2410916"/>
           </a:xfrm>
           <a:prstGeom prst="rect">
             <a:avLst/>
@@ -4253,6 +4311,19 @@
             <a:pPr algn="l">
               <a:buNone/>
             </a:pPr>
+            <a:r>
+              <a:rPr lang="en-US" sz="2400" b="0" i="0">
+                <a:solidFill>
+                  <a:schemeClr val="accent6">
+                    <a:lumMod val="60000"/>
+                    <a:lumOff val="40000"/>
+                  </a:schemeClr>
+                </a:solidFill>
+                <a:effectLst/>
+                <a:latin typeface="Anthropic Sans"/>
+              </a:rPr>
+              <a:t>🧱Feature </a:t>
+            </a:r>
             <a:r>
               <a:rPr lang="en-US" sz="2400" b="0" i="0" dirty="0">
                 <a:solidFill>
@@ -4264,25 +4335,7 @@
                 <a:effectLst/>
                 <a:latin typeface="Anthropic Sans"/>
               </a:rPr>
-              <a:t>🧱</a:t>
-            </a:r>
-          </a:p>
-          <a:p>
-            <a:pPr algn="l">
-              <a:buNone/>
-            </a:pPr>
-            <a:r>
-              <a:rPr lang="en-US" sz="2400" b="0" i="0" dirty="0">
-                <a:solidFill>
-                  <a:schemeClr val="accent6">
-                    <a:lumMod val="60000"/>
-                    <a:lumOff val="40000"/>
-                  </a:schemeClr>
-                </a:solidFill>
-                <a:effectLst/>
-                <a:latin typeface="Anthropic Sans"/>
-              </a:rPr>
-              <a:t>Feature engineering for fraud</a:t>
+              <a:t>engineering for fraud</a:t>
             </a:r>
           </a:p>
           <a:p>
@@ -4994,7 +5047,7 @@
         <p:spPr>
           <a:xfrm>
             <a:off x="644652" y="923080"/>
-            <a:ext cx="11992356" cy="4593565"/>
+            <a:ext cx="10995660" cy="4593565"/>
           </a:xfrm>
           <a:prstGeom prst="rect">
             <a:avLst/>
@@ -5183,7 +5236,7 @@
         <p:spPr>
           <a:xfrm>
             <a:off x="612648" y="338141"/>
-            <a:ext cx="10351008" cy="1595309"/>
+            <a:ext cx="10351008" cy="1225977"/>
           </a:xfrm>
           <a:prstGeom prst="rect">
             <a:avLst/>
@@ -5199,6 +5252,19 @@
             <a:pPr algn="l">
               <a:buNone/>
             </a:pPr>
+            <a:r>
+              <a:rPr lang="en-US" sz="2400" b="0" i="0">
+                <a:solidFill>
+                  <a:schemeClr val="accent6">
+                    <a:lumMod val="60000"/>
+                    <a:lumOff val="40000"/>
+                  </a:schemeClr>
+                </a:solidFill>
+                <a:effectLst/>
+                <a:latin typeface="Anthropic Sans"/>
+              </a:rPr>
+              <a:t>🕸️Graph </a:t>
+            </a:r>
             <a:r>
               <a:rPr lang="en-US" sz="2400" b="0" i="0" dirty="0">
                 <a:solidFill>
@@ -5210,25 +5276,7 @@
                 <a:effectLst/>
                 <a:latin typeface="Anthropic Sans"/>
               </a:rPr>
-              <a:t>🕸️</a:t>
-            </a:r>
-          </a:p>
-          <a:p>
-            <a:pPr algn="l">
-              <a:buNone/>
-            </a:pPr>
-            <a:r>
-              <a:rPr lang="en-US" sz="2400" b="0" i="0" dirty="0">
-                <a:solidFill>
-                  <a:schemeClr val="accent6">
-                    <a:lumMod val="60000"/>
-                    <a:lumOff val="40000"/>
-                  </a:schemeClr>
-                </a:solidFill>
-                <a:effectLst/>
-                <a:latin typeface="Anthropic Sans"/>
-              </a:rPr>
-              <a:t>Graph features — following the money</a:t>
+              <a:t>features — following the money</a:t>
             </a:r>
           </a:p>
           <a:p>
